--- a/classes/parte-8-blue-team-deteccion-y-soc/197-metricas-y-madurez-del-soc/clase-197-presentacion.pptx
+++ b/classes/parte-8-blue-team-deteccion-y-soc/197-metricas-y-madurez-del-soc/clase-197-presentacion.pptx
@@ -17,6 +17,11 @@
     <p:sldId id="265" r:id="rId16"/>
     <p:sldId id="266" r:id="rId17"/>
     <p:sldId id="267" r:id="rId18"/>
+    <p:sldId id="268" r:id="rId19"/>
+    <p:sldId id="269" r:id="rId20"/>
+    <p:sldId id="270" r:id="rId21"/>
+    <p:sldId id="271" r:id="rId22"/>
+    <p:sldId id="272" r:id="rId23"/>
   </p:sldIdLst>
   <p:sldSz cx="9144000" cy="6858000" type="screen4x3"/>
   <p:notesSz cx="6858000" cy="9144000"/>
@@ -3198,7 +3203,7 @@
                   <a:srgbClr val="0B3D2E"/>
                 </a:solidFill>
               </a:rPr>
-              <a:t>⚠️ Errores comunes</a:t>
+              <a:t>🧰 Herramientas y preparación</a:t>
             </a:r>
           </a:p>
         </p:txBody>
@@ -3236,67 +3241,67 @@
                   <a:srgbClr val="22282E"/>
                 </a:solidFill>
               </a:rPr>
-              <a:t>•  MTTR excelente, incidentes reinciden — Se cierra sin erradicar; añade métrica de reincidencia</a:t>
-            </a:r>
-          </a:p>
-          <a:p>
-            <a:pPr>
-              <a:spcAft>
-                <a:spcPts val="600"/>
-              </a:spcAft>
-            </a:pPr>
-            <a:r>
-              <a:rPr sz="1500">
-                <a:solidFill>
-                  <a:srgbClr val="22282E"/>
-                </a:solidFill>
-              </a:rPr>
-              <a:t>•  "Procesamos 1M de alertas" — Métrica vanidosa; reporta calidad y resultado, no volumen</a:t>
-            </a:r>
-          </a:p>
-          <a:p>
-            <a:pPr>
-              <a:spcAft>
-                <a:spcPts val="600"/>
-              </a:spcAft>
-            </a:pPr>
-            <a:r>
-              <a:rPr sz="1500">
-                <a:solidFill>
-                  <a:srgbClr val="22282E"/>
-                </a:solidFill>
-              </a:rPr>
-              <a:t>•  Cobertura ATT&amp;CK al 95% pero se cuelan ataques — Presencia sin profundidad; mide eficacia real de cada detección</a:t>
-            </a:r>
-          </a:p>
-          <a:p>
-            <a:pPr>
-              <a:spcAft>
-                <a:spcPts val="600"/>
-              </a:spcAft>
-            </a:pPr>
-            <a:r>
-              <a:rPr sz="1500">
-                <a:solidFill>
-                  <a:srgbClr val="22282E"/>
-                </a:solidFill>
-              </a:rPr>
-              <a:t>•  Métricas que nadie usa — Se reportan pero no priorizan; ligá cada métrica a una decisión</a:t>
-            </a:r>
-          </a:p>
-          <a:p>
-            <a:pPr>
-              <a:spcAft>
-                <a:spcPts val="600"/>
-              </a:spcAft>
-            </a:pPr>
-            <a:r>
-              <a:rPr sz="1500">
-                <a:solidFill>
-                  <a:srgbClr val="22282E"/>
-                </a:solidFill>
-              </a:rPr>
-              <a:t>•  Datos inconsistentes — Fuentes mal definidas; documenta fórmula y origen de cada KPI</a:t>
+              <a:t>•  Datos de tu SIEM/ticketing de laboratorio (o dataset simulado) para calcular métricas.</a:t>
+            </a:r>
+          </a:p>
+          <a:p>
+            <a:pPr>
+              <a:spcAft>
+                <a:spcPts val="600"/>
+              </a:spcAft>
+            </a:pPr>
+            <a:r>
+              <a:rPr sz="1500">
+                <a:solidFill>
+                  <a:srgbClr val="22282E"/>
+                </a:solidFill>
+              </a:rPr>
+              <a:t>•  Una hoja de cálculo o dashboard (Kibana/Grafana) para el cuadro de mando.</a:t>
+            </a:r>
+          </a:p>
+          <a:p>
+            <a:pPr>
+              <a:spcAft>
+                <a:spcPts val="600"/>
+              </a:spcAft>
+            </a:pPr>
+            <a:r>
+              <a:rPr sz="1500">
+                <a:solidFill>
+                  <a:srgbClr val="22282E"/>
+                </a:solidFill>
+              </a:rPr>
+              <a:t>•  El SOC-CMM (herramienta de autoevaluación gratuita) para medir madurez.</a:t>
+            </a:r>
+          </a:p>
+          <a:p>
+            <a:pPr>
+              <a:spcAft>
+                <a:spcPts val="600"/>
+              </a:spcAft>
+            </a:pPr>
+            <a:r>
+              <a:rPr sz="1500">
+                <a:solidFill>
+                  <a:srgbClr val="22282E"/>
+                </a:solidFill>
+              </a:rPr>
+              <a:t>•  ATT&amp;CK Navigator (clase 187) para la métrica de cobertura.</a:t>
+            </a:r>
+          </a:p>
+          <a:p>
+            <a:pPr>
+              <a:spcAft>
+                <a:spcPts val="600"/>
+              </a:spcAft>
+            </a:pPr>
+            <a:r>
+              <a:rPr sz="1500">
+                <a:solidFill>
+                  <a:srgbClr val="22282E"/>
+                </a:solidFill>
+              </a:rPr>
+              <a:t>•  No se requieren técnicas ofensivas; es una clase de gobierno y medición.</a:t>
             </a:r>
           </a:p>
         </p:txBody>
@@ -3347,7 +3352,7 @@
                   <a:srgbClr val="0B3D2E"/>
                 </a:solidFill>
               </a:rPr>
-              <a:t>❓ Preguntas frecuentes</a:t>
+              <a:t>🧪 Laboratorio guiado — Cuadro de mando del SOC</a:t>
             </a:r>
           </a:p>
         </p:txBody>
@@ -3385,82 +3390,97 @@
                   <a:srgbClr val="22282E"/>
                 </a:solidFill>
               </a:rPr>
-              <a:t>•  ❓ ¿Cuál es la métrica más importante?</a:t>
-            </a:r>
-          </a:p>
-          <a:p>
-            <a:pPr>
-              <a:spcAft>
-                <a:spcPts val="600"/>
-              </a:spcAft>
-            </a:pPr>
-            <a:r>
-              <a:rPr sz="1500">
-                <a:solidFill>
-                  <a:srgbClr val="22282E"/>
-                </a:solidFill>
-              </a:rPr>
-              <a:t>•  Dwell time es la que mejor refleja el impacto real: cuánto tiempo estuvo el atacante sin ser visto. MTTD y MTTR la explican; el resto la contextualizan.</a:t>
-            </a:r>
-          </a:p>
-          <a:p>
-            <a:pPr>
-              <a:spcAft>
-                <a:spcPts val="600"/>
-              </a:spcAft>
-            </a:pPr>
-            <a:r>
-              <a:rPr sz="1500">
-                <a:solidFill>
-                  <a:srgbClr val="22282E"/>
-                </a:solidFill>
-              </a:rPr>
-              <a:t>•  ❓ ¿Por qué evitar métricas de volumen?</a:t>
-            </a:r>
-          </a:p>
-          <a:p>
-            <a:pPr>
-              <a:spcAft>
-                <a:spcPts val="600"/>
-              </a:spcAft>
-            </a:pPr>
-            <a:r>
-              <a:rPr sz="1500">
-                <a:solidFill>
-                  <a:srgbClr val="22282E"/>
-                </a:solidFill>
-              </a:rPr>
-              <a:t>•  Porque incentivan el comportamiento equivocado: cerrar alertas rápido o inflar cifras. Mide resultados (detectado, contenido, erradicado), no actividad.</a:t>
-            </a:r>
-          </a:p>
-          <a:p>
-            <a:pPr>
-              <a:spcAft>
-                <a:spcPts val="600"/>
-              </a:spcAft>
-            </a:pPr>
-            <a:r>
-              <a:rPr sz="1500">
-                <a:solidFill>
-                  <a:srgbClr val="22282E"/>
-                </a:solidFill>
-              </a:rPr>
-              <a:t>•  ❓ ¿Cómo comunico el valor del SOC a dirección?</a:t>
-            </a:r>
-          </a:p>
-          <a:p>
-            <a:pPr>
-              <a:spcAft>
-                <a:spcPts val="600"/>
-              </a:spcAft>
-            </a:pPr>
-            <a:r>
-              <a:rPr sz="1500">
-                <a:solidFill>
-                  <a:srgbClr val="22282E"/>
-                </a:solidFill>
-              </a:rPr>
-              <a:t>•  Con tendencias de riesgo y dwell time, no con jerga técnica. Muestra cómo la inversión reduce el tiempo de exposición y el impacto potencial.</a:t>
+              <a:t>•  Elige tus KPIs. Selecciona 6 métricas: MTTD, MTTR, dwell time, % falsos positivos, cobertura ATT&amp;CK y % incidentes con causa raíz documentada.</a:t>
+            </a:r>
+          </a:p>
+          <a:p>
+            <a:pPr>
+              <a:spcAft>
+                <a:spcPts val="600"/>
+              </a:spcAft>
+            </a:pPr>
+            <a:r>
+              <a:rPr sz="1500">
+                <a:solidFill>
+                  <a:srgbClr val="22282E"/>
+                </a:solidFill>
+              </a:rPr>
+              <a:t>•  Define fórmula y fuente. Para cada una, especifica cómo se calcula y de qué log/ticket sale.</a:t>
+            </a:r>
+          </a:p>
+          <a:p>
+            <a:pPr>
+              <a:spcAft>
+                <a:spcPts val="600"/>
+              </a:spcAft>
+            </a:pPr>
+            <a:r>
+              <a:rPr sz="1500">
+                <a:solidFill>
+                  <a:srgbClr val="22282E"/>
+                </a:solidFill>
+              </a:rPr>
+              <a:t>•  Calcula con datos. Usa tus tickets/alertas de laboratorio (o un CSV simulado) para obtener valores reales.</a:t>
+            </a:r>
+          </a:p>
+          <a:p>
+            <a:pPr>
+              <a:spcAft>
+                <a:spcPts val="600"/>
+              </a:spcAft>
+            </a:pPr>
+            <a:r>
+              <a:rPr sz="1500">
+                <a:solidFill>
+                  <a:srgbClr val="22282E"/>
+                </a:solidFill>
+              </a:rPr>
+              <a:t>•  Detecta gaming. Para cada métrica, imagina cómo un equipo podría manipularla y añade un contrapeso (p. ej. MTTR bajo + tasa de reincidencia).</a:t>
+            </a:r>
+          </a:p>
+          <a:p>
+            <a:pPr>
+              <a:spcAft>
+                <a:spcPts val="600"/>
+              </a:spcAft>
+            </a:pPr>
+            <a:r>
+              <a:rPr sz="1500">
+                <a:solidFill>
+                  <a:srgbClr val="22282E"/>
+                </a:solidFill>
+              </a:rPr>
+              <a:t>•  Mide madurez. Completa una autoevaluación SOC-CMM en 2–3 dominios y anota tu nivel.</a:t>
+            </a:r>
+          </a:p>
+          <a:p>
+            <a:pPr>
+              <a:spcAft>
+                <a:spcPts val="600"/>
+              </a:spcAft>
+            </a:pPr>
+            <a:r>
+              <a:rPr sz="1500">
+                <a:solidFill>
+                  <a:srgbClr val="22282E"/>
+                </a:solidFill>
+              </a:rPr>
+              <a:t>•  Construye dos vistas. Un dashboard operativo (colas, falsos positivos, cobertura) y uno ejecutivo (tendencia de dwell time, riesgo).</a:t>
+            </a:r>
+          </a:p>
+          <a:p>
+            <a:pPr>
+              <a:spcAft>
+                <a:spcPts val="600"/>
+              </a:spcAft>
+            </a:pPr>
+            <a:r>
+              <a:rPr sz="1500">
+                <a:solidFill>
+                  <a:srgbClr val="22282E"/>
+                </a:solidFill>
+              </a:rPr>
+              <a:t>•  Prioriza mejoras. Con las métricas, define las 3 acciones de mayor impacto para el próximo trimestre.</a:t>
             </a:r>
           </a:p>
         </p:txBody>
@@ -3511,7 +3531,7 @@
                   <a:srgbClr val="0B3D2E"/>
                 </a:solidFill>
               </a:rPr>
-              <a:t>🔗 Referencias</a:t>
+              <a:t>✍️ Ejercicios</a:t>
             </a:r>
           </a:p>
         </p:txBody>
@@ -3549,71 +3569,727 @@
                   <a:srgbClr val="22282E"/>
                 </a:solidFill>
               </a:rPr>
-              <a:t>•  Murdoch, D. Blue Team Handbook: SOC, SIEM, and Threat Hunting Use Cases.</a:t>
-            </a:r>
-          </a:p>
-          <a:p>
-            <a:pPr>
-              <a:spcAft>
-                <a:spcPts val="600"/>
-              </a:spcAft>
-            </a:pPr>
-            <a:r>
-              <a:rPr sz="1500">
-                <a:solidFill>
-                  <a:srgbClr val="22282E"/>
-                </a:solidFill>
-              </a:rPr>
-              <a:t>•  SOC-CMM — &lt;https://www.soc-cmm.com/&gt;</a:t>
-            </a:r>
-          </a:p>
-          <a:p>
-            <a:pPr>
-              <a:spcAft>
-                <a:spcPts val="600"/>
-              </a:spcAft>
-            </a:pPr>
-            <a:r>
-              <a:rPr sz="1500">
-                <a:solidFill>
-                  <a:srgbClr val="22282E"/>
-                </a:solidFill>
-              </a:rPr>
-              <a:t>•  MITRE ATT&amp;CK Navigator — &lt;https://mitre-attack.github.io/attack-navigator/&gt;</a:t>
-            </a:r>
-          </a:p>
-          <a:p>
-            <a:pPr>
-              <a:spcAft>
-                <a:spcPts val="600"/>
-              </a:spcAft>
-            </a:pPr>
-            <a:r>
-              <a:rPr sz="1500">
-                <a:solidFill>
-                  <a:srgbClr val="22282E"/>
-                </a:solidFill>
-              </a:rPr>
-              <a:t>•  Mandiant M-Trends (informes de dwell time) — &lt;https://www.mandiant.com/m-trends&gt;</a:t>
-            </a:r>
-          </a:p>
-          <a:p>
-            <a:pPr>
-              <a:spcAft>
-                <a:spcPts val="600"/>
-              </a:spcAft>
-            </a:pPr>
-            <a:r>
-              <a:rPr sz="1500">
-                <a:solidFill>
-                  <a:srgbClr val="22282E"/>
-                </a:solidFill>
-              </a:rPr>
-              <a:t>•  SANS, "SOC Metrics" (recursos formativos).</a:t>
-            </a:r>
-          </a:p>
-        </p:txBody>
-      </p:sp>
+              <a:t>•  Escribe la fórmula y la fuente de datos de 5 métricas del SOC.</a:t>
+            </a:r>
+          </a:p>
+          <a:p>
+            <a:pPr>
+              <a:spcAft>
+                <a:spcPts val="600"/>
+              </a:spcAft>
+            </a:pPr>
+            <a:r>
+              <a:rPr sz="1500">
+                <a:solidFill>
+                  <a:srgbClr val="22282E"/>
+                </a:solidFill>
+              </a:rPr>
+              <a:t>•  Identifica 3 métricas vanidosas y propón su reemplazo útil.</a:t>
+            </a:r>
+          </a:p>
+          <a:p>
+            <a:pPr>
+              <a:spcAft>
+                <a:spcPts val="600"/>
+              </a:spcAft>
+            </a:pPr>
+            <a:r>
+              <a:rPr sz="1500">
+                <a:solidFill>
+                  <a:srgbClr val="22282E"/>
+                </a:solidFill>
+              </a:rPr>
+              <a:t>•  Calcula MTTD y MTTR de un conjunto de 10 incidentes de ejemplo.</a:t>
+            </a:r>
+          </a:p>
+          <a:p>
+            <a:pPr>
+              <a:spcAft>
+                <a:spcPts val="600"/>
+              </a:spcAft>
+            </a:pPr>
+            <a:r>
+              <a:rPr sz="1500">
+                <a:solidFill>
+                  <a:srgbClr val="22282E"/>
+                </a:solidFill>
+              </a:rPr>
+              <a:t>•  Diseña un contrapeso para evitar el gaming de MTTR.</a:t>
+            </a:r>
+          </a:p>
+          <a:p>
+            <a:pPr>
+              <a:spcAft>
+                <a:spcPts val="600"/>
+              </a:spcAft>
+            </a:pPr>
+            <a:r>
+              <a:rPr sz="1500">
+                <a:solidFill>
+                  <a:srgbClr val="22282E"/>
+                </a:solidFill>
+              </a:rPr>
+              <a:t>•  Completa una mini autoevaluación de madurez en un dominio.</a:t>
+            </a:r>
+          </a:p>
+          <a:p>
+            <a:pPr>
+              <a:spcAft>
+                <a:spcPts val="600"/>
+              </a:spcAft>
+            </a:pPr>
+            <a:r>
+              <a:rPr sz="1500">
+                <a:solidFill>
+                  <a:srgbClr val="22282E"/>
+                </a:solidFill>
+              </a:rPr>
+              <a:t>•  Propón un KPI que mida la calidad de las detecciones, no solo la cantidad.</a:t>
+            </a:r>
+          </a:p>
+        </p:txBody>
+      </p:sp>
+    </p:spTree>
+  </p:cSld>
+  <p:clrMapOvr>
+    <a:masterClrMapping/>
+  </p:clrMapOvr>
+</p:sld>
+</file>
+
+<file path=ppt/slides/slide13.xml><?xml version="1.0" encoding="utf-8"?>
+<p:sld xmlns:a="http://schemas.openxmlformats.org/drawingml/2006/main" xmlns:p="http://schemas.openxmlformats.org/presentationml/2006/main" xmlns:r="http://schemas.openxmlformats.org/officeDocument/2006/relationships">
+  <p:cSld>
+    <p:spTree>
+      <p:nvGrpSpPr>
+        <p:cNvPr id="1" name=""/>
+        <p:cNvGrpSpPr/>
+        <p:nvPr/>
+      </p:nvGrpSpPr>
+      <p:grpSpPr/>
+      <p:sp>
+        <p:nvSpPr>
+          <p:cNvPr id="2" name="TextBox 1"/>
+          <p:cNvSpPr txBox="1"/>
+          <p:nvPr/>
+        </p:nvSpPr>
+        <p:spPr>
+          <a:xfrm>
+            <a:off x="457200" y="320040"/>
+            <a:ext cx="8229600" cy="822960"/>
+          </a:xfrm>
+          <a:prstGeom prst="rect">
+            <a:avLst/>
+          </a:prstGeom>
+          <a:noFill/>
+        </p:spPr>
+        <p:txBody>
+          <a:bodyPr wrap="square">
+            <a:spAutoFit/>
+          </a:bodyPr>
+          <a:lstStyle/>
+          <a:p>
+            <a:r>
+              <a:rPr sz="2600" b="1">
+                <a:solidFill>
+                  <a:srgbClr val="0B3D2E"/>
+                </a:solidFill>
+              </a:rPr>
+              <a:t>📝 Reto verificable</a:t>
+            </a:r>
+          </a:p>
+        </p:txBody>
+      </p:sp>
+      <p:sp>
+        <p:nvSpPr>
+          <p:cNvPr id="3" name="TextBox 2"/>
+          <p:cNvSpPr txBox="1"/>
+          <p:nvPr/>
+        </p:nvSpPr>
+        <p:spPr>
+          <a:xfrm>
+            <a:off x="457200" y="1280160"/>
+            <a:ext cx="8229600" cy="4937760"/>
+          </a:xfrm>
+          <a:prstGeom prst="rect">
+            <a:avLst/>
+          </a:prstGeom>
+          <a:noFill/>
+        </p:spPr>
+        <p:txBody>
+          <a:bodyPr wrap="square">
+            <a:spAutoFit/>
+          </a:bodyPr>
+          <a:lstStyle/>
+          <a:p>
+            <a:pPr>
+              <a:spcAft>
+                <a:spcPts val="600"/>
+              </a:spcAft>
+            </a:pPr>
+            <a:r>
+              <a:rPr sz="1500">
+                <a:solidFill>
+                  <a:srgbClr val="22282E"/>
+                </a:solidFill>
+              </a:rPr>
+              <a:t>•  Entrega un cuadro de mando con al menos 6 métricas (fórmula, fuente y valor calculado), sus contrapesos anti-gaming, y una evaluación de madurez con 3 mejoras priorizadas. Criterio de aceptación…</a:t>
+            </a:r>
+          </a:p>
+        </p:txBody>
+      </p:sp>
+    </p:spTree>
+  </p:cSld>
+  <p:clrMapOvr>
+    <a:masterClrMapping/>
+  </p:clrMapOvr>
+</p:sld>
+</file>
+
+<file path=ppt/slides/slide14.xml><?xml version="1.0" encoding="utf-8"?>
+<p:sld xmlns:a="http://schemas.openxmlformats.org/drawingml/2006/main" xmlns:p="http://schemas.openxmlformats.org/presentationml/2006/main" xmlns:r="http://schemas.openxmlformats.org/officeDocument/2006/relationships">
+  <p:cSld>
+    <p:spTree>
+      <p:nvGrpSpPr>
+        <p:cNvPr id="1" name=""/>
+        <p:cNvGrpSpPr/>
+        <p:nvPr/>
+      </p:nvGrpSpPr>
+      <p:grpSpPr/>
+      <p:sp>
+        <p:nvSpPr>
+          <p:cNvPr id="2" name="TextBox 1"/>
+          <p:cNvSpPr txBox="1"/>
+          <p:nvPr/>
+        </p:nvSpPr>
+        <p:spPr>
+          <a:xfrm>
+            <a:off x="457200" y="320040"/>
+            <a:ext cx="8229600" cy="822960"/>
+          </a:xfrm>
+          <a:prstGeom prst="rect">
+            <a:avLst/>
+          </a:prstGeom>
+          <a:noFill/>
+        </p:spPr>
+        <p:txBody>
+          <a:bodyPr wrap="square">
+            <a:spAutoFit/>
+          </a:bodyPr>
+          <a:lstStyle/>
+          <a:p>
+            <a:r>
+              <a:rPr sz="2600" b="1">
+                <a:solidFill>
+                  <a:srgbClr val="0B3D2E"/>
+                </a:solidFill>
+              </a:rPr>
+              <a:t>⚠️ Errores comunes</a:t>
+            </a:r>
+          </a:p>
+        </p:txBody>
+      </p:sp>
+      <p:sp>
+        <p:nvSpPr>
+          <p:cNvPr id="3" name="TextBox 2"/>
+          <p:cNvSpPr txBox="1"/>
+          <p:nvPr/>
+        </p:nvSpPr>
+        <p:spPr>
+          <a:xfrm>
+            <a:off x="457200" y="1280160"/>
+            <a:ext cx="8229600" cy="4937760"/>
+          </a:xfrm>
+          <a:prstGeom prst="rect">
+            <a:avLst/>
+          </a:prstGeom>
+          <a:noFill/>
+        </p:spPr>
+        <p:txBody>
+          <a:bodyPr wrap="square">
+            <a:spAutoFit/>
+          </a:bodyPr>
+          <a:lstStyle/>
+          <a:p>
+            <a:pPr>
+              <a:spcAft>
+                <a:spcPts val="600"/>
+              </a:spcAft>
+            </a:pPr>
+            <a:r>
+              <a:rPr sz="1500">
+                <a:solidFill>
+                  <a:srgbClr val="22282E"/>
+                </a:solidFill>
+              </a:rPr>
+              <a:t>•  MTTR excelente, incidentes reinciden — Se cierra sin erradicar; añade métrica de reincidencia</a:t>
+            </a:r>
+          </a:p>
+          <a:p>
+            <a:pPr>
+              <a:spcAft>
+                <a:spcPts val="600"/>
+              </a:spcAft>
+            </a:pPr>
+            <a:r>
+              <a:rPr sz="1500">
+                <a:solidFill>
+                  <a:srgbClr val="22282E"/>
+                </a:solidFill>
+              </a:rPr>
+              <a:t>•  "Procesamos 1M de alertas" — Métrica vanidosa; reporta calidad y resultado, no volumen</a:t>
+            </a:r>
+          </a:p>
+          <a:p>
+            <a:pPr>
+              <a:spcAft>
+                <a:spcPts val="600"/>
+              </a:spcAft>
+            </a:pPr>
+            <a:r>
+              <a:rPr sz="1500">
+                <a:solidFill>
+                  <a:srgbClr val="22282E"/>
+                </a:solidFill>
+              </a:rPr>
+              <a:t>•  Cobertura ATT&amp;CK al 95% pero se cuelan ataques — Presencia sin profundidad; mide eficacia real de cada detección</a:t>
+            </a:r>
+          </a:p>
+          <a:p>
+            <a:pPr>
+              <a:spcAft>
+                <a:spcPts val="600"/>
+              </a:spcAft>
+            </a:pPr>
+            <a:r>
+              <a:rPr sz="1500">
+                <a:solidFill>
+                  <a:srgbClr val="22282E"/>
+                </a:solidFill>
+              </a:rPr>
+              <a:t>•  Métricas que nadie usa — Se reportan pero no priorizan; ligá cada métrica a una decisión</a:t>
+            </a:r>
+          </a:p>
+          <a:p>
+            <a:pPr>
+              <a:spcAft>
+                <a:spcPts val="600"/>
+              </a:spcAft>
+            </a:pPr>
+            <a:r>
+              <a:rPr sz="1500">
+                <a:solidFill>
+                  <a:srgbClr val="22282E"/>
+                </a:solidFill>
+              </a:rPr>
+              <a:t>•  Datos inconsistentes — Fuentes mal definidas; documenta fórmula y origen de cada KPI</a:t>
+            </a:r>
+          </a:p>
+        </p:txBody>
+      </p:sp>
+    </p:spTree>
+  </p:cSld>
+  <p:clrMapOvr>
+    <a:masterClrMapping/>
+  </p:clrMapOvr>
+</p:sld>
+</file>
+
+<file path=ppt/slides/slide15.xml><?xml version="1.0" encoding="utf-8"?>
+<p:sld xmlns:a="http://schemas.openxmlformats.org/drawingml/2006/main" xmlns:p="http://schemas.openxmlformats.org/presentationml/2006/main" xmlns:r="http://schemas.openxmlformats.org/officeDocument/2006/relationships">
+  <p:cSld>
+    <p:spTree>
+      <p:nvGrpSpPr>
+        <p:cNvPr id="1" name=""/>
+        <p:cNvGrpSpPr/>
+        <p:nvPr/>
+      </p:nvGrpSpPr>
+      <p:grpSpPr/>
+      <p:sp>
+        <p:nvSpPr>
+          <p:cNvPr id="2" name="TextBox 1"/>
+          <p:cNvSpPr txBox="1"/>
+          <p:nvPr/>
+        </p:nvSpPr>
+        <p:spPr>
+          <a:xfrm>
+            <a:off x="457200" y="320040"/>
+            <a:ext cx="8229600" cy="822960"/>
+          </a:xfrm>
+          <a:prstGeom prst="rect">
+            <a:avLst/>
+          </a:prstGeom>
+          <a:noFill/>
+        </p:spPr>
+        <p:txBody>
+          <a:bodyPr wrap="square">
+            <a:spAutoFit/>
+          </a:bodyPr>
+          <a:lstStyle/>
+          <a:p>
+            <a:r>
+              <a:rPr sz="2600" b="1">
+                <a:solidFill>
+                  <a:srgbClr val="0B3D2E"/>
+                </a:solidFill>
+              </a:rPr>
+              <a:t>❓ Preguntas frecuentes</a:t>
+            </a:r>
+          </a:p>
+        </p:txBody>
+      </p:sp>
+      <p:sp>
+        <p:nvSpPr>
+          <p:cNvPr id="3" name="TextBox 2"/>
+          <p:cNvSpPr txBox="1"/>
+          <p:nvPr/>
+        </p:nvSpPr>
+        <p:spPr>
+          <a:xfrm>
+            <a:off x="457200" y="1280160"/>
+            <a:ext cx="8229600" cy="4937760"/>
+          </a:xfrm>
+          <a:prstGeom prst="rect">
+            <a:avLst/>
+          </a:prstGeom>
+          <a:noFill/>
+        </p:spPr>
+        <p:txBody>
+          <a:bodyPr wrap="square">
+            <a:spAutoFit/>
+          </a:bodyPr>
+          <a:lstStyle/>
+          <a:p>
+            <a:pPr>
+              <a:spcAft>
+                <a:spcPts val="600"/>
+              </a:spcAft>
+            </a:pPr>
+            <a:r>
+              <a:rPr sz="1500">
+                <a:solidFill>
+                  <a:srgbClr val="22282E"/>
+                </a:solidFill>
+              </a:rPr>
+              <a:t>•  ❓ ¿Cuál es la métrica más importante?</a:t>
+            </a:r>
+          </a:p>
+          <a:p>
+            <a:pPr>
+              <a:spcAft>
+                <a:spcPts val="600"/>
+              </a:spcAft>
+            </a:pPr>
+            <a:r>
+              <a:rPr sz="1500">
+                <a:solidFill>
+                  <a:srgbClr val="22282E"/>
+                </a:solidFill>
+              </a:rPr>
+              <a:t>•  Dwell time es la que mejor refleja el impacto real: cuánto tiempo estuvo el atacante sin ser visto. MTTD y MTTR la explican; el resto la contextualizan.</a:t>
+            </a:r>
+          </a:p>
+          <a:p>
+            <a:pPr>
+              <a:spcAft>
+                <a:spcPts val="600"/>
+              </a:spcAft>
+            </a:pPr>
+            <a:r>
+              <a:rPr sz="1500">
+                <a:solidFill>
+                  <a:srgbClr val="22282E"/>
+                </a:solidFill>
+              </a:rPr>
+              <a:t>•  ❓ ¿Por qué evitar métricas de volumen?</a:t>
+            </a:r>
+          </a:p>
+          <a:p>
+            <a:pPr>
+              <a:spcAft>
+                <a:spcPts val="600"/>
+              </a:spcAft>
+            </a:pPr>
+            <a:r>
+              <a:rPr sz="1500">
+                <a:solidFill>
+                  <a:srgbClr val="22282E"/>
+                </a:solidFill>
+              </a:rPr>
+              <a:t>•  Porque incentivan el comportamiento equivocado: cerrar alertas rápido o inflar cifras. Mide resultados (detectado, contenido, erradicado), no actividad.</a:t>
+            </a:r>
+          </a:p>
+          <a:p>
+            <a:pPr>
+              <a:spcAft>
+                <a:spcPts val="600"/>
+              </a:spcAft>
+            </a:pPr>
+            <a:r>
+              <a:rPr sz="1500">
+                <a:solidFill>
+                  <a:srgbClr val="22282E"/>
+                </a:solidFill>
+              </a:rPr>
+              <a:t>•  ❓ ¿Cómo comunico el valor del SOC a dirección?</a:t>
+            </a:r>
+          </a:p>
+          <a:p>
+            <a:pPr>
+              <a:spcAft>
+                <a:spcPts val="600"/>
+              </a:spcAft>
+            </a:pPr>
+            <a:r>
+              <a:rPr sz="1500">
+                <a:solidFill>
+                  <a:srgbClr val="22282E"/>
+                </a:solidFill>
+              </a:rPr>
+              <a:t>•  Con tendencias de riesgo y dwell time, no con jerga técnica. Muestra cómo la inversión reduce el tiempo de exposición y el impacto potencial.</a:t>
+            </a:r>
+          </a:p>
+        </p:txBody>
+      </p:sp>
+    </p:spTree>
+  </p:cSld>
+  <p:clrMapOvr>
+    <a:masterClrMapping/>
+  </p:clrMapOvr>
+</p:sld>
+</file>
+
+<file path=ppt/slides/slide16.xml><?xml version="1.0" encoding="utf-8"?>
+<p:sld xmlns:a="http://schemas.openxmlformats.org/drawingml/2006/main" xmlns:p="http://schemas.openxmlformats.org/presentationml/2006/main" xmlns:r="http://schemas.openxmlformats.org/officeDocument/2006/relationships">
+  <p:cSld>
+    <p:spTree>
+      <p:nvGrpSpPr>
+        <p:cNvPr id="1" name=""/>
+        <p:cNvGrpSpPr/>
+        <p:nvPr/>
+      </p:nvGrpSpPr>
+      <p:grpSpPr/>
+      <p:sp>
+        <p:nvSpPr>
+          <p:cNvPr id="2" name="TextBox 1"/>
+          <p:cNvSpPr txBox="1"/>
+          <p:nvPr/>
+        </p:nvSpPr>
+        <p:spPr>
+          <a:xfrm>
+            <a:off x="457200" y="320040"/>
+            <a:ext cx="8229600" cy="822960"/>
+          </a:xfrm>
+          <a:prstGeom prst="rect">
+            <a:avLst/>
+          </a:prstGeom>
+          <a:noFill/>
+        </p:spPr>
+        <p:txBody>
+          <a:bodyPr wrap="square">
+            <a:spAutoFit/>
+          </a:bodyPr>
+          <a:lstStyle/>
+          <a:p>
+            <a:r>
+              <a:rPr sz="2600" b="1">
+                <a:solidFill>
+                  <a:srgbClr val="0B3D2E"/>
+                </a:solidFill>
+              </a:rPr>
+              <a:t>🔗 Referencias verificables y alcance</a:t>
+            </a:r>
+          </a:p>
+        </p:txBody>
+      </p:sp>
+      <p:sp>
+        <p:nvSpPr>
+          <p:cNvPr id="3" name="TextBox 2"/>
+          <p:cNvSpPr txBox="1"/>
+          <p:nvPr/>
+        </p:nvSpPr>
+        <p:spPr>
+          <a:xfrm>
+            <a:off x="457200" y="1280160"/>
+            <a:ext cx="8229600" cy="4937760"/>
+          </a:xfrm>
+          <a:prstGeom prst="rect">
+            <a:avLst/>
+          </a:prstGeom>
+          <a:noFill/>
+        </p:spPr>
+        <p:txBody>
+          <a:bodyPr wrap="square">
+            <a:spAutoFit/>
+          </a:bodyPr>
+          <a:lstStyle/>
+          <a:p>
+            <a:pPr>
+              <a:spcAft>
+                <a:spcPts val="600"/>
+              </a:spcAft>
+            </a:pPr>
+            <a:r>
+              <a:rPr sz="1500">
+                <a:solidFill>
+                  <a:srgbClr val="22282E"/>
+                </a:solidFill>
+              </a:rPr>
+              <a:t>•  NIST SP 800-55 Vol. 1: fuente primaria para identificar y seleccionar medidas de seguridad vinculadas con objetivos y decisiones — &lt;https://doi.org/10.6028/NIST.SP.800-55v1&gt;</a:t>
+            </a:r>
+          </a:p>
+          <a:p>
+            <a:pPr>
+              <a:spcAft>
+                <a:spcPts val="600"/>
+              </a:spcAft>
+            </a:pPr>
+            <a:r>
+              <a:rPr sz="1500">
+                <a:solidFill>
+                  <a:srgbClr val="22282E"/>
+                </a:solidFill>
+              </a:rPr>
+              <a:t>•  NIST SP 800-55 Vol. 2: fuente primaria para desarrollar un programa de medición, incluida recolección, análisis, comunicación y revisión — &lt;https://doi.org/10.6028/NIST.SP.800-55v2&gt;</a:t>
+            </a:r>
+          </a:p>
+          <a:p>
+            <a:pPr>
+              <a:spcAft>
+                <a:spcPts val="600"/>
+              </a:spcAft>
+            </a:pPr>
+            <a:r>
+              <a:rPr sz="1500">
+                <a:solidFill>
+                  <a:srgbClr val="22282E"/>
+                </a:solidFill>
+              </a:rPr>
+              <a:t>•  MITRE ATT&amp;CK Navigator: herramienta oficial para visualizar capas de cobertura; no calcula eficacia, profundidad ni calidad de telemetría — &lt;https://mitre-attack.github.io/attack-navigator/&gt;</a:t>
+            </a:r>
+          </a:p>
+          <a:p>
+            <a:pPr>
+              <a:spcAft>
+                <a:spcPts val="600"/>
+              </a:spcAft>
+            </a:pPr>
+            <a:r>
+              <a:rPr sz="1500">
+                <a:solidFill>
+                  <a:srgbClr val="22282E"/>
+                </a:solidFill>
+              </a:rPr>
+              <a:t>•  SOC-CMM: modelo público especializado para autoevaluación de madurez; es una referencia de trabajo, no una certificación de NIST o MITRE — &lt;https://www.soc-cmm.com/&gt;</a:t>
+            </a:r>
+          </a:p>
+          <a:p>
+            <a:pPr>
+              <a:spcAft>
+                <a:spcPts val="600"/>
+              </a:spcAft>
+            </a:pPr>
+            <a:r>
+              <a:rPr sz="1500">
+                <a:solidFill>
+                  <a:srgbClr val="22282E"/>
+                </a:solidFill>
+              </a:rPr>
+              <a:t>•  Mandiant M-Trends: informe anual usado como ejemplo de cómo se publica dwell time sobre una población observada; no constituye un benchmark universal — &lt;https://www.mandiant.com/m-trends&gt;</a:t>
+            </a:r>
+          </a:p>
+          <a:p>
+            <a:pPr>
+              <a:spcAft>
+                <a:spcPts val="600"/>
+              </a:spcAft>
+            </a:pPr>
+            <a:r>
+              <a:rPr sz="1500">
+                <a:solidFill>
+                  <a:srgbClr val="22282E"/>
+                </a:solidFill>
+              </a:rPr>
+              <a:t>•  Murdoch, D. Blue Team Handbook: SOC, SIEM, and Threat Hunting Use Cases: bibliografía profesional complementaria.</a:t>
+            </a:r>
+          </a:p>
+        </p:txBody>
+      </p:sp>
+    </p:spTree>
+  </p:cSld>
+  <p:clrMapOvr>
+    <a:masterClrMapping/>
+  </p:clrMapOvr>
+</p:sld>
+</file>
+
+<file path=ppt/slides/slide17.xml><?xml version="1.0" encoding="utf-8"?>
+<p:sld xmlns:a="http://schemas.openxmlformats.org/drawingml/2006/main" xmlns:p="http://schemas.openxmlformats.org/presentationml/2006/main" xmlns:r="http://schemas.openxmlformats.org/officeDocument/2006/relationships">
+  <p:cSld>
+    <p:spTree>
+      <p:nvGrpSpPr>
+        <p:cNvPr id="1" name=""/>
+        <p:cNvGrpSpPr/>
+        <p:nvPr/>
+      </p:nvGrpSpPr>
+      <p:grpSpPr/>
+      <p:sp>
+        <p:nvSpPr>
+          <p:cNvPr id="2" name="TextBox 1"/>
+          <p:cNvSpPr txBox="1"/>
+          <p:nvPr/>
+        </p:nvSpPr>
+        <p:spPr>
+          <a:xfrm>
+            <a:off x="457200" y="274320"/>
+            <a:ext cx="8229600" cy="640080"/>
+          </a:xfrm>
+          <a:prstGeom prst="rect">
+            <a:avLst/>
+          </a:prstGeom>
+          <a:noFill/>
+        </p:spPr>
+        <p:txBody>
+          <a:bodyPr wrap="square">
+            <a:spAutoFit/>
+          </a:bodyPr>
+          <a:lstStyle/>
+          <a:p>
+            <a:r>
+              <a:rPr sz="2200" b="1">
+                <a:solidFill>
+                  <a:srgbClr val="0B3D2E"/>
+                </a:solidFill>
+              </a:rPr>
+              <a:t>Diagrama de la clase</a:t>
+            </a:r>
+          </a:p>
+        </p:txBody>
+      </p:sp>
+      <p:pic>
+        <p:nvPicPr>
+          <p:cNvPr id="3" name="Picture 2" descr="9800a1c203c24665.png"/>
+          <p:cNvPicPr>
+            <a:picLocks noChangeAspect="1"/>
+          </p:cNvPicPr>
+          <p:nvPr/>
+        </p:nvPicPr>
+        <p:blipFill>
+          <a:blip r:embed="rId2"/>
+          <a:stretch>
+            <a:fillRect/>
+          </a:stretch>
+        </p:blipFill>
+        <p:spPr>
+          <a:xfrm>
+            <a:off x="457200" y="3410712"/>
+            <a:ext cx="8229600" cy="676656"/>
+          </a:xfrm>
+          <a:prstGeom prst="rect">
+            <a:avLst/>
+          </a:prstGeom>
+        </p:spPr>
+      </p:pic>
     </p:spTree>
   </p:cSld>
   <p:clrMapOvr>
@@ -3698,7 +4374,7 @@
                   <a:srgbClr val="22282E"/>
                 </a:solidFill>
               </a:rPr>
-              <a:t>•  Medir el rendimiento y la madurez de un SOC con métricas defendibles, evitando indicadores vanidosos que se pueden manipular. Aprenderás a definir KPIs de detección y respuesta (MTTD, MTTR, dwell time, cobertura ATT&amp;CK), a evaluar la madurez con un modelo (SOC-CMM) y a comunicar el valor del SOC a la dirección.</a:t>
+              <a:t>•  Medir el rendimiento y la madurez de un SOC con métricas defendibles, evitando indicadores vanidosos que se pueden manipular. Aprenderás a definir KPIs de detección y respuesta (MTTD, MTTR, dwell…</a:t>
             </a:r>
           </a:p>
         </p:txBody>
@@ -4092,7 +4768,7 @@
                   <a:srgbClr val="0B3D2E"/>
                 </a:solidFill>
               </a:rPr>
-              <a:t>📖 Definiciones y características</a:t>
+              <a:t>🧠 Explicación en profundidad</a:t>
             </a:r>
           </a:p>
         </p:txBody>
@@ -4130,97 +4806,97 @@
                   <a:srgbClr val="22282E"/>
                 </a:solidFill>
               </a:rPr>
-              <a:t>•  MTTD (Mean Time To Detect): tiempo medio hasta detectar un incidente. Característica: mide la eficacia de la detección; cuanto menor, mejor.</a:t>
-            </a:r>
-          </a:p>
-          <a:p>
-            <a:pPr>
-              <a:spcAft>
-                <a:spcPts val="600"/>
-              </a:spcAft>
-            </a:pPr>
-            <a:r>
-              <a:rPr sz="1500">
-                <a:solidFill>
-                  <a:srgbClr val="22282E"/>
-                </a:solidFill>
-              </a:rPr>
-              <a:t>•  MTTR (Mean Time To Respond/Remediate): tiempo hasta contener/erradicar. Característica: mide la respuesta; distingue "respond" de "remediate".</a:t>
-            </a:r>
-          </a:p>
-          <a:p>
-            <a:pPr>
-              <a:spcAft>
-                <a:spcPts val="600"/>
-              </a:spcAft>
-            </a:pPr>
-            <a:r>
-              <a:rPr sz="1500">
-                <a:solidFill>
-                  <a:srgbClr val="22282E"/>
-                </a:solidFill>
-              </a:rPr>
-              <a:t>•  Dwell time: tiempo total del atacante sin ser detectado. Característica: métrica reina; refleja el impacto real.</a:t>
-            </a:r>
-          </a:p>
-          <a:p>
-            <a:pPr>
-              <a:spcAft>
-                <a:spcPts val="600"/>
-              </a:spcAft>
-            </a:pPr>
-            <a:r>
-              <a:rPr sz="1500">
-                <a:solidFill>
-                  <a:srgbClr val="22282E"/>
-                </a:solidFill>
-              </a:rPr>
-              <a:t>•  Tasa de falsos positivos: proporción de alertas que no eran incidentes. Característica: alta = fatiga y coste; guía el afinado.</a:t>
-            </a:r>
-          </a:p>
-          <a:p>
-            <a:pPr>
-              <a:spcAft>
-                <a:spcPts val="600"/>
-              </a:spcAft>
-            </a:pPr>
-            <a:r>
-              <a:rPr sz="1500">
-                <a:solidFill>
-                  <a:srgbClr val="22282E"/>
-                </a:solidFill>
-              </a:rPr>
-              <a:t>•  Cobertura ATT&amp;CK: técnicas detectadas frente al total relevante. Característica: mide amplitud; debe combinarse con profundidad.</a:t>
-            </a:r>
-          </a:p>
-          <a:p>
-            <a:pPr>
-              <a:spcAft>
-                <a:spcPts val="600"/>
-              </a:spcAft>
-            </a:pPr>
-            <a:r>
-              <a:rPr sz="1500">
-                <a:solidFill>
-                  <a:srgbClr val="22282E"/>
-                </a:solidFill>
-              </a:rPr>
-              <a:t>•  Métrica vanidosa: número que impresiona pero no informa (p. ej. "alertas procesadas"). Característica: incentiva el gaming, no la mejora.</a:t>
-            </a:r>
-          </a:p>
-          <a:p>
-            <a:pPr>
-              <a:spcAft>
-                <a:spcPts val="600"/>
-              </a:spcAft>
-            </a:pPr>
-            <a:r>
-              <a:rPr sz="1500">
-                <a:solidFill>
-                  <a:srgbClr val="22282E"/>
-                </a:solidFill>
-              </a:rPr>
-              <a:t>•  SOC-CMM: modelo de madurez de capacidades del SOC. Característica: evalúa personas, procesos, tecnología y servicios.</a:t>
+              <a:t>•  Una métrica útil empieza por una decisión: objetivo, pregunta, medida, fuente y acción. Si el SOC no sabe qué decisión cambiará, el indicador se convierte en decoración o incentivo perverso.</a:t>
+            </a:r>
+          </a:p>
+          <a:p>
+            <a:pPr>
+              <a:spcAft>
+                <a:spcPts val="600"/>
+              </a:spcAft>
+            </a:pPr>
+            <a:r>
+              <a:rPr sz="1500">
+                <a:solidFill>
+                  <a:srgbClr val="22282E"/>
+                </a:solidFill>
+              </a:rPr>
+              <a:t>•  MTTD y MTTR requieren inicio, fin, población y zona horaria. El promedio oculta colas largas; mediana y percentiles muestran distribución. Los incidentes nunca detectados no entran por sí solos en…</a:t>
+            </a:r>
+          </a:p>
+          <a:p>
+            <a:pPr>
+              <a:spcAft>
+                <a:spcPts val="600"/>
+              </a:spcAft>
+            </a:pPr>
+            <a:r>
+              <a:rPr sz="1500">
+                <a:solidFill>
+                  <a:srgbClr val="22282E"/>
+                </a:solidFill>
+              </a:rPr>
+              <a:t>•  NIST SP 800-55 Vol. 2 propone desarrollar un programa de medición ligado a objetivos de seguridad. Aplicado al SOC, si el objetivo es reducir exposición de activos críticos, la pregunta puede ser…</a:t>
+            </a:r>
+          </a:p>
+          <a:p>
+            <a:pPr>
+              <a:spcAft>
+                <a:spcPts val="600"/>
+              </a:spcAft>
+            </a:pPr>
+            <a:r>
+              <a:rPr sz="1500">
+                <a:solidFill>
+                  <a:srgbClr val="22282E"/>
+                </a:solidFill>
+              </a:rPr>
+              <a:t>•  MTTR es ambiguo porque la R puede significar reconocer, responder, remediar o recuperar. Dos equipos pueden publicar «dos horas» midiendo intervalos distintos. La clase exige escribir la fórmula con…</a:t>
+            </a:r>
+          </a:p>
+          <a:p>
+            <a:pPr>
+              <a:spcAft>
+                <a:spcPts val="600"/>
+              </a:spcAft>
+            </a:pPr>
+            <a:r>
+              <a:rPr sz="1500">
+                <a:solidFill>
+                  <a:srgbClr val="22282E"/>
+                </a:solidFill>
+              </a:rPr>
+              <a:t>•  La precisión se aproxima con verdaderos positivos entre alertas clasificadas como positivas, pero las disposiciones de analistas pueden contener error. Recall exige conocer positivos que la detección…</a:t>
+            </a:r>
+          </a:p>
+          <a:p>
+            <a:pPr>
+              <a:spcAft>
+                <a:spcPts val="600"/>
+              </a:spcAft>
+            </a:pPr>
+            <a:r>
+              <a:rPr sz="1500">
+                <a:solidFill>
+                  <a:srgbClr val="22282E"/>
+                </a:solidFill>
+              </a:rPr>
+              <a:t>•  MTTD sufre sesgo de selección: solo incluye incidentes descubiertos y cuyo inicio pudo estimarse. Dwell time reportado externamente suele usar otra población. Por eso se documentan límites y no se…</a:t>
+            </a:r>
+          </a:p>
+          <a:p>
+            <a:pPr>
+              <a:spcAft>
+                <a:spcPts val="600"/>
+              </a:spcAft>
+            </a:pPr>
+            <a:r>
+              <a:rPr sz="1500">
+                <a:solidFill>
+                  <a:srgbClr val="22282E"/>
+                </a:solidFill>
+              </a:rPr>
+              <a:t>•  SOC-CMM puede ordenar conversaciones de madurez, pero una puntuación necesita evidencia: roles, pruebas, calidad de datos, revisión de reglas, ejercicios y acciones cerradas. ATT&amp;CK Navigator…</a:t>
             </a:r>
           </a:p>
         </p:txBody>
@@ -4271,7 +4947,7 @@
                   <a:srgbClr val="0B3D2E"/>
                 </a:solidFill>
               </a:rPr>
-              <a:t>🧰 Herramientas y preparación</a:t>
+              <a:t>📔 Glosario</a:t>
             </a:r>
           </a:p>
         </p:txBody>
@@ -4309,67 +4985,97 @@
                   <a:srgbClr val="22282E"/>
                 </a:solidFill>
               </a:rPr>
-              <a:t>•  Datos de tu SIEM/ticketing de laboratorio (o dataset simulado) para calcular métricas.</a:t>
-            </a:r>
-          </a:p>
-          <a:p>
-            <a:pPr>
-              <a:spcAft>
-                <a:spcPts val="600"/>
-              </a:spcAft>
-            </a:pPr>
-            <a:r>
-              <a:rPr sz="1500">
-                <a:solidFill>
-                  <a:srgbClr val="22282E"/>
-                </a:solidFill>
-              </a:rPr>
-              <a:t>•  Una hoja de cálculo o dashboard (Kibana/Grafana) para el cuadro de mando.</a:t>
-            </a:r>
-          </a:p>
-          <a:p>
-            <a:pPr>
-              <a:spcAft>
-                <a:spcPts val="600"/>
-              </a:spcAft>
-            </a:pPr>
-            <a:r>
-              <a:rPr sz="1500">
-                <a:solidFill>
-                  <a:srgbClr val="22282E"/>
-                </a:solidFill>
-              </a:rPr>
-              <a:t>•  El SOC-CMM (herramienta de autoevaluación gratuita) para medir madurez.</a:t>
-            </a:r>
-          </a:p>
-          <a:p>
-            <a:pPr>
-              <a:spcAft>
-                <a:spcPts val="600"/>
-              </a:spcAft>
-            </a:pPr>
-            <a:r>
-              <a:rPr sz="1500">
-                <a:solidFill>
-                  <a:srgbClr val="22282E"/>
-                </a:solidFill>
-              </a:rPr>
-              <a:t>•  ATT&amp;CK Navigator (clase 187) para la métrica de cobertura.</a:t>
-            </a:r>
-          </a:p>
-          <a:p>
-            <a:pPr>
-              <a:spcAft>
-                <a:spcPts val="600"/>
-              </a:spcAft>
-            </a:pPr>
-            <a:r>
-              <a:rPr sz="1500">
-                <a:solidFill>
-                  <a:srgbClr val="22282E"/>
-                </a:solidFill>
-              </a:rPr>
-              <a:t>•  No se requieren técnicas ofensivas; es una clase de gobierno y medición.</a:t>
+              <a:t>•  Medida: valor obtenido mediante una regla definida.</a:t>
+            </a:r>
+          </a:p>
+          <a:p>
+            <a:pPr>
+              <a:spcAft>
+                <a:spcPts val="600"/>
+              </a:spcAft>
+            </a:pPr>
+            <a:r>
+              <a:rPr sz="1500">
+                <a:solidFill>
+                  <a:srgbClr val="22282E"/>
+                </a:solidFill>
+              </a:rPr>
+              <a:t>•  Métrica: interpretación de medidas para un objetivo.</a:t>
+            </a:r>
+          </a:p>
+          <a:p>
+            <a:pPr>
+              <a:spcAft>
+                <a:spcPts val="600"/>
+              </a:spcAft>
+            </a:pPr>
+            <a:r>
+              <a:rPr sz="1500">
+                <a:solidFill>
+                  <a:srgbClr val="22282E"/>
+                </a:solidFill>
+              </a:rPr>
+              <a:t>•  Indicador: señal que apoya una decisión.</a:t>
+            </a:r>
+          </a:p>
+          <a:p>
+            <a:pPr>
+              <a:spcAft>
+                <a:spcPts val="600"/>
+              </a:spcAft>
+            </a:pPr>
+            <a:r>
+              <a:rPr sz="1500">
+                <a:solidFill>
+                  <a:srgbClr val="22282E"/>
+                </a:solidFill>
+              </a:rPr>
+              <a:t>•  Percentil: umbral bajo el que cae una proporción de casos.</a:t>
+            </a:r>
+          </a:p>
+          <a:p>
+            <a:pPr>
+              <a:spcAft>
+                <a:spcPts val="600"/>
+              </a:spcAft>
+            </a:pPr>
+            <a:r>
+              <a:rPr sz="1500">
+                <a:solidFill>
+                  <a:srgbClr val="22282E"/>
+                </a:solidFill>
+              </a:rPr>
+              <a:t>•  Precisión: proporción de alertas relevantes.</a:t>
+            </a:r>
+          </a:p>
+          <a:p>
+            <a:pPr>
+              <a:spcAft>
+                <a:spcPts val="600"/>
+              </a:spcAft>
+            </a:pPr>
+            <a:r>
+              <a:rPr sz="1500">
+                <a:solidFill>
+                  <a:srgbClr val="22282E"/>
+                </a:solidFill>
+              </a:rPr>
+              <a:t>•  Recall: proporción de positivos reales detectados.</a:t>
+            </a:r>
+          </a:p>
+          <a:p>
+            <a:pPr>
+              <a:spcAft>
+                <a:spcPts val="600"/>
+              </a:spcAft>
+            </a:pPr>
+            <a:r>
+              <a:rPr sz="1500">
+                <a:solidFill>
+                  <a:srgbClr val="22282E"/>
+                </a:solidFill>
+              </a:rPr>
+              <a:t>•  Ground truth: referencia para evaluar resultados.</a:t>
             </a:r>
           </a:p>
         </p:txBody>
@@ -4420,7 +5126,7 @@
                   <a:srgbClr val="0B3D2E"/>
                 </a:solidFill>
               </a:rPr>
-              <a:t>🧪 Laboratorio guiado — Cuadro de mando del SOC</a:t>
+              <a:t>📖 Definiciones y características</a:t>
             </a:r>
           </a:p>
         </p:txBody>
@@ -4458,97 +5164,97 @@
                   <a:srgbClr val="22282E"/>
                 </a:solidFill>
               </a:rPr>
-              <a:t>•  Elige tus KPIs. Selecciona 6 métricas: MTTD, MTTR, dwell time, % falsos positivos, cobertura ATT&amp;CK y % incidentes con causa raíz documentada.</a:t>
-            </a:r>
-          </a:p>
-          <a:p>
-            <a:pPr>
-              <a:spcAft>
-                <a:spcPts val="600"/>
-              </a:spcAft>
-            </a:pPr>
-            <a:r>
-              <a:rPr sz="1500">
-                <a:solidFill>
-                  <a:srgbClr val="22282E"/>
-                </a:solidFill>
-              </a:rPr>
-              <a:t>•  Define fórmula y fuente. Para cada una, especifica cómo se calcula y de qué log/ticket sale.</a:t>
-            </a:r>
-          </a:p>
-          <a:p>
-            <a:pPr>
-              <a:spcAft>
-                <a:spcPts val="600"/>
-              </a:spcAft>
-            </a:pPr>
-            <a:r>
-              <a:rPr sz="1500">
-                <a:solidFill>
-                  <a:srgbClr val="22282E"/>
-                </a:solidFill>
-              </a:rPr>
-              <a:t>•  Calcula con datos. Usa tus tickets/alertas de laboratorio (o un CSV simulado) para obtener valores reales.</a:t>
-            </a:r>
-          </a:p>
-          <a:p>
-            <a:pPr>
-              <a:spcAft>
-                <a:spcPts val="600"/>
-              </a:spcAft>
-            </a:pPr>
-            <a:r>
-              <a:rPr sz="1500">
-                <a:solidFill>
-                  <a:srgbClr val="22282E"/>
-                </a:solidFill>
-              </a:rPr>
-              <a:t>•  Detecta gaming. Para cada métrica, imagina cómo un equipo podría manipularla y añade un contrapeso (p. ej. MTTR bajo + tasa de reincidencia).</a:t>
-            </a:r>
-          </a:p>
-          <a:p>
-            <a:pPr>
-              <a:spcAft>
-                <a:spcPts val="600"/>
-              </a:spcAft>
-            </a:pPr>
-            <a:r>
-              <a:rPr sz="1500">
-                <a:solidFill>
-                  <a:srgbClr val="22282E"/>
-                </a:solidFill>
-              </a:rPr>
-              <a:t>•  Mide madurez. Completa una autoevaluación SOC-CMM en 2–3 dominios y anota tu nivel.</a:t>
-            </a:r>
-          </a:p>
-          <a:p>
-            <a:pPr>
-              <a:spcAft>
-                <a:spcPts val="600"/>
-              </a:spcAft>
-            </a:pPr>
-            <a:r>
-              <a:rPr sz="1500">
-                <a:solidFill>
-                  <a:srgbClr val="22282E"/>
-                </a:solidFill>
-              </a:rPr>
-              <a:t>•  Construye dos vistas. Un dashboard operativo (colas, falsos positivos, cobertura) y uno ejecutivo (tendencia de dwell time, riesgo).</a:t>
-            </a:r>
-          </a:p>
-          <a:p>
-            <a:pPr>
-              <a:spcAft>
-                <a:spcPts val="600"/>
-              </a:spcAft>
-            </a:pPr>
-            <a:r>
-              <a:rPr sz="1500">
-                <a:solidFill>
-                  <a:srgbClr val="22282E"/>
-                </a:solidFill>
-              </a:rPr>
-              <a:t>•  Prioriza mejoras. Con las métricas, define las 3 acciones de mayor impacto para el próximo trimestre.</a:t>
+              <a:t>•  MTTD (Mean Time To Detect): media de un intervalo de detección definido. Característica: requiere inicio, fin, población y límites antes de interpretarse.</a:t>
+            </a:r>
+          </a:p>
+          <a:p>
+            <a:pPr>
+              <a:spcAft>
+                <a:spcPts val="600"/>
+              </a:spcAft>
+            </a:pPr>
+            <a:r>
+              <a:rPr sz="1500">
+                <a:solidFill>
+                  <a:srgbClr val="22282E"/>
+                </a:solidFill>
+              </a:rPr>
+              <a:t>•  MTTR (Mean Time To Respond/Remediate): tiempo hasta contener/erradicar. Característica: mide la respuesta; distingue "respond" de "remediate".</a:t>
+            </a:r>
+          </a:p>
+          <a:p>
+            <a:pPr>
+              <a:spcAft>
+                <a:spcPts val="600"/>
+              </a:spcAft>
+            </a:pPr>
+            <a:r>
+              <a:rPr sz="1500">
+                <a:solidFill>
+                  <a:srgbClr val="22282E"/>
+                </a:solidFill>
+              </a:rPr>
+              <a:t>•  Dwell time: intervalo estimado de presencia no detectada para incidentes conocidos. Característica: está sujeto a sesgo de selección y a incertidumbre sobre el inicio.</a:t>
+            </a:r>
+          </a:p>
+          <a:p>
+            <a:pPr>
+              <a:spcAft>
+                <a:spcPts val="600"/>
+              </a:spcAft>
+            </a:pPr>
+            <a:r>
+              <a:rPr sz="1500">
+                <a:solidFill>
+                  <a:srgbClr val="22282E"/>
+                </a:solidFill>
+              </a:rPr>
+              <a:t>•  Tasa de falsos positivos: proporción de alertas que no eran incidentes. Característica: alta = fatiga y coste; guía el afinado.</a:t>
+            </a:r>
+          </a:p>
+          <a:p>
+            <a:pPr>
+              <a:spcAft>
+                <a:spcPts val="600"/>
+              </a:spcAft>
+            </a:pPr>
+            <a:r>
+              <a:rPr sz="1500">
+                <a:solidFill>
+                  <a:srgbClr val="22282E"/>
+                </a:solidFill>
+              </a:rPr>
+              <a:t>•  Cobertura ATT&amp;CK: técnicas detectadas frente al total relevante. Característica: mide amplitud; debe combinarse con profundidad.</a:t>
+            </a:r>
+          </a:p>
+          <a:p>
+            <a:pPr>
+              <a:spcAft>
+                <a:spcPts val="600"/>
+              </a:spcAft>
+            </a:pPr>
+            <a:r>
+              <a:rPr sz="1500">
+                <a:solidFill>
+                  <a:srgbClr val="22282E"/>
+                </a:solidFill>
+              </a:rPr>
+              <a:t>•  Métrica vanidosa: número que impresiona pero no informa (p. ej. "alertas procesadas"). Característica: incentiva el gaming, no la mejora.</a:t>
+            </a:r>
+          </a:p>
+          <a:p>
+            <a:pPr>
+              <a:spcAft>
+                <a:spcPts val="600"/>
+              </a:spcAft>
+            </a:pPr>
+            <a:r>
+              <a:rPr sz="1500">
+                <a:solidFill>
+                  <a:srgbClr val="22282E"/>
+                </a:solidFill>
+              </a:rPr>
+              <a:t>•  SOC-CMM: modelo de madurez de capacidades del SOC. Característica: evalúa personas, procesos, tecnología y servicios.</a:t>
             </a:r>
           </a:p>
         </p:txBody>
@@ -4599,7 +5305,7 @@
                   <a:srgbClr val="0B3D2E"/>
                 </a:solidFill>
               </a:rPr>
-              <a:t>✍️ Ejercicios</a:t>
+              <a:t>🔍 Métrica construida — tiempo hasta contención</a:t>
             </a:r>
           </a:p>
         </p:txBody>
@@ -4637,82 +5343,37 @@
                   <a:srgbClr val="22282E"/>
                 </a:solidFill>
               </a:rPr>
-              <a:t>•  Escribe la fórmula y la fuente de datos de 5 métricas del SOC.</a:t>
-            </a:r>
-          </a:p>
-          <a:p>
-            <a:pPr>
-              <a:spcAft>
-                <a:spcPts val="600"/>
-              </a:spcAft>
-            </a:pPr>
-            <a:r>
-              <a:rPr sz="1500">
-                <a:solidFill>
-                  <a:srgbClr val="22282E"/>
-                </a:solidFill>
-              </a:rPr>
-              <a:t>•  Identifica 3 métricas vanidosas y propón su reemplazo útil.</a:t>
-            </a:r>
-          </a:p>
-          <a:p>
-            <a:pPr>
-              <a:spcAft>
-                <a:spcPts val="600"/>
-              </a:spcAft>
-            </a:pPr>
-            <a:r>
-              <a:rPr sz="1500">
-                <a:solidFill>
-                  <a:srgbClr val="22282E"/>
-                </a:solidFill>
-              </a:rPr>
-              <a:t>•  Calcula MTTD y MTTR de un conjunto de 10 incidentes de ejemplo.</a:t>
-            </a:r>
-          </a:p>
-          <a:p>
-            <a:pPr>
-              <a:spcAft>
-                <a:spcPts val="600"/>
-              </a:spcAft>
-            </a:pPr>
-            <a:r>
-              <a:rPr sz="1500">
-                <a:solidFill>
-                  <a:srgbClr val="22282E"/>
-                </a:solidFill>
-              </a:rPr>
-              <a:t>•  Diseña un contrapeso para evitar el gaming de MTTR.</a:t>
-            </a:r>
-          </a:p>
-          <a:p>
-            <a:pPr>
-              <a:spcAft>
-                <a:spcPts val="600"/>
-              </a:spcAft>
-            </a:pPr>
-            <a:r>
-              <a:rPr sz="1500">
-                <a:solidFill>
-                  <a:srgbClr val="22282E"/>
-                </a:solidFill>
-              </a:rPr>
-              <a:t>•  Completa una mini autoevaluación de madurez en un dominio.</a:t>
-            </a:r>
-          </a:p>
-          <a:p>
-            <a:pPr>
-              <a:spcAft>
-                <a:spcPts val="600"/>
-              </a:spcAft>
-            </a:pPr>
-            <a:r>
-              <a:rPr sz="1500">
-                <a:solidFill>
-                  <a:srgbClr val="22282E"/>
-                </a:solidFill>
-              </a:rPr>
-              <a:t>•  Propón un KPI que mida la calidad de las detecciones, no solo la cantidad.</a:t>
+              <a:t>•  Objetivo: reducir exposición de incidentes confirmados de severidad alta. Inicio: timestamp de confirmación registrado en el caso. Fin: aislamiento o revocación verificados. Población: incidentes…</a:t>
+            </a:r>
+          </a:p>
+          <a:p>
+            <a:pPr>
+              <a:spcAft>
+                <a:spcPts val="600"/>
+              </a:spcAft>
+            </a:pPr>
+            <a:r>
+              <a:rPr sz="1500">
+                <a:solidFill>
+                  <a:srgbClr val="22282E"/>
+                </a:solidFill>
+              </a:rPr>
+              <a:t>•  La métrica excluye deliberadamente tiempo antes de confirmación; no debe llamarse tiempo desde compromiso. Un caso sin contención se conserva como observación censurada o excepción documentada, no se…</a:t>
+            </a:r>
+          </a:p>
+          <a:p>
+            <a:pPr>
+              <a:spcAft>
+                <a:spcPts val="600"/>
+              </a:spcAft>
+            </a:pPr>
+            <a:r>
+              <a:rPr sz="1500">
+                <a:solidFill>
+                  <a:srgbClr val="22282E"/>
+                </a:solidFill>
+              </a:rPr>
+              <a:t>•  Se acompaña con calidad/reapertura para evitar contención aparente. Después de cambiar el proceso se compara una ventana suficiente y se explican cambios de población. NIST SP 800-55 Vol. 2 respalda…</a:t>
             </a:r>
           </a:p>
         </p:txBody>
@@ -4763,7 +5424,7 @@
                   <a:srgbClr val="0B3D2E"/>
                 </a:solidFill>
               </a:rPr>
-              <a:t>📝 Reto verificable</a:t>
+              <a:t>✅ Criterio de dominio</a:t>
             </a:r>
           </a:p>
         </p:txBody>
@@ -4801,7 +5462,7 @@
                   <a:srgbClr val="22282E"/>
                 </a:solidFill>
               </a:rPr>
-              <a:t>•  Entrega un cuadro de mando con al menos 6 métricas (fórmula, fuente y valor calculado), sus contrapesos anti-gaming, y una evaluación de madurez con 3 mejoras priorizadas. Criterio de aceptación: cada métrica tiene fórmula y origen de datos verificable, al menos una detecta explícitamente un intento de manipulación (contrapeso), y las mejoras priorizadas se justifican con los valores medidos, no con opiniones.</a:t>
+              <a:t>•  El alumno define fórmula con eventos reales, población, segmentación, límites y decisión; detecta incentivos perversos. Escribir «mejorar MTTR» sin definir R ni timestamps no cumple.</a:t>
             </a:r>
           </a:p>
         </p:txBody>
